--- a/docs/ahg-2026/kit/step-cards/0-before-the-day.pptx
+++ b/docs/ahg-2026/kit/step-cards/0-before-the-day.pptx
@@ -19,6 +19,7 @@
     <p:sldId id="267" r:id="rId18"/>
     <p:sldId id="268" r:id="rId19"/>
     <p:sldId id="269" r:id="rId20"/>
+    <p:sldId id="270" r:id="rId21"/>
   </p:sldIdLst>
   <p:sldSz cx="12191695" cy="6858000" type="screen4x3"/>
   <p:notesSz cx="6858000" cy="9144000"/>
@@ -3282,7 +3283,7 @@
               <a:rPr sz="2000" b="0" lang="en-US">
                 <a:latin typeface="Arial"/>
               </a:rPr>
-              <a:t>Share your practice agent. Open letitglow.app/ahg/share in your browser, choose "My practice agent", choose the file my-agent/SKILL.md from the kit, and press "Open the share form on GitHub". On GitHub, tick the privacy box at the end of the form and press "Submit new issue".</a:t>
+              <a:t>Share your practice agent. Open letitglow.app/ahg/share in your browser, choose "My practice agent", choose the file my-agent/SKILL.md from the kit, and press "Open the share form on GitHub". On GitHub, select the privacy check box at the end of the form and press "Submit new issue".</a:t>
             </a:r>
           </a:p>
         </p:txBody>
@@ -3742,6 +3743,127 @@
 </p:sld>
 </file>
 
+<file path=ppt/slides/slide15.xml><?xml version="1.0" encoding="utf-8"?>
+<p:sld xmlns:a="http://schemas.openxmlformats.org/drawingml/2006/main" xmlns:p="http://schemas.openxmlformats.org/presentationml/2006/main" xmlns:r="http://schemas.openxmlformats.org/officeDocument/2006/relationships">
+  <p:cSld>
+    <p:spTree>
+      <p:nvGrpSpPr>
+        <p:cNvPr id="1" name=""/>
+        <p:cNvGrpSpPr/>
+        <p:nvPr/>
+      </p:nvGrpSpPr>
+      <p:grpSpPr/>
+      <p:sp>
+        <p:nvSpPr>
+          <p:cNvPr id="2" name="Title 1"/>
+          <p:cNvSpPr>
+            <a:spLocks noGrp="1"/>
+          </p:cNvSpPr>
+          <p:nvPr>
+            <p:ph type="title"/>
+          </p:nvPr>
+        </p:nvSpPr>
+        <p:spPr>
+          <a:xfrm>
+            <a:off x="548640" y="365760"/>
+            <a:ext cx="11064240" cy="1097280"/>
+          </a:xfrm>
+        </p:spPr>
+        <p:txBody>
+          <a:bodyPr wrap="square"/>
+          <a:lstStyle/>
+          <a:p>
+            <a:r>
+              <a:rPr sz="3600" b="1" lang="en-US">
+                <a:latin typeface="Arial"/>
+              </a:rPr>
+              <a:t>Sources</a:t>
+            </a:r>
+          </a:p>
+        </p:txBody>
+      </p:sp>
+      <p:sp>
+        <p:nvSpPr>
+          <p:cNvPr id="3" name="Content Placeholder 2"/>
+          <p:cNvSpPr>
+            <a:spLocks noGrp="1"/>
+          </p:cNvSpPr>
+          <p:nvPr>
+            <p:ph idx="1"/>
+          </p:nvPr>
+        </p:nvSpPr>
+        <p:spPr>
+          <a:xfrm>
+            <a:off x="548640" y="1554480"/>
+            <a:ext cx="11064240" cy="4937760"/>
+          </a:xfrm>
+        </p:spPr>
+        <p:txBody>
+          <a:bodyPr wrap="square"/>
+          <a:lstStyle/>
+          <a:p>
+            <a:pPr marL="0" indent="0">
+              <a:spcAft>
+                <a:spcPts val="600"/>
+              </a:spcAft>
+              <a:buNone/>
+            </a:pPr>
+            <a:r>
+              <a:rPr sz="2000" b="0" lang="en-US">
+                <a:latin typeface="Arial"/>
+              </a:rPr>
+              <a:t>Checked on 29 October 2026: </a:t>
+            </a:r>
+            <a:r>
+              <a:rPr sz="2000" b="0" lang="en-US">
+                <a:latin typeface="Arial"/>
+                <a:hlinkClick r:id="rId2"/>
+              </a:rPr>
+              <a:t>setting up Copilot in VS Code</a:t>
+            </a:r>
+            <a:r>
+              <a:rPr sz="2000" b="0" lang="en-US">
+                <a:latin typeface="Arial"/>
+              </a:rPr>
+              <a:t> (signing in turns on Copilot Free), </a:t>
+            </a:r>
+            <a:r>
+              <a:rPr sz="2000" b="0" lang="en-US">
+                <a:latin typeface="Arial"/>
+                <a:hlinkClick r:id="rId3"/>
+              </a:rPr>
+              <a:t>profiles</a:t>
+            </a:r>
+            <a:r>
+              <a:rPr sz="2000" b="0" lang="en-US">
+                <a:latin typeface="Arial"/>
+              </a:rPr>
+              <a:t> (importing one) and </a:t>
+            </a:r>
+            <a:r>
+              <a:rPr sz="2000" b="0" lang="en-US">
+                <a:latin typeface="Arial"/>
+                <a:hlinkClick r:id="rId4"/>
+              </a:rPr>
+              <a:t>VS Code for the Web</a:t>
+            </a:r>
+            <a:r>
+              <a:rPr sz="2000" b="0" lang="en-US">
+                <a:latin typeface="Arial"/>
+              </a:rPr>
+              <a:t> (opening a folder needs Chrome or Edge). The keys on every card are in the kit's README, with its sources.</a:t>
+            </a:r>
+          </a:p>
+        </p:txBody>
+      </p:sp>
+    </p:spTree>
+  </p:cSld>
+  <p:clrMapOvr>
+    <a:masterClrMapping/>
+  </p:clrMapOvr>
+</p:sld>
+</file>
+
 <file path=ppt/slides/slide2.xml><?xml version="1.0" encoding="utf-8"?>
 <p:sld xmlns:a="http://schemas.openxmlformats.org/drawingml/2006/main" xmlns:p="http://schemas.openxmlformats.org/presentationml/2006/main" xmlns:r="http://schemas.openxmlformats.org/officeDocument/2006/relationships">
   <p:cSld>
@@ -3896,6 +4018,32 @@
               <a:t>A laptop that is ready for the whole workshop, a message from your AI assistant saying so, and your practice agent already shared, so sharing on the day is the second time, not the first.</a:t>
             </a:r>
           </a:p>
+          <a:p>
+            <a:pPr marL="0" indent="0">
+              <a:spcAft>
+                <a:spcPts val="600"/>
+              </a:spcAft>
+              <a:buNone/>
+            </a:pPr>
+            <a:r>
+              <a:rPr sz="2000" b="0" lang="en-US">
+                <a:latin typeface="Arial"/>
+              </a:rPr>
+              <a:t>New to words like agent, skill or Copilot Chat? Read </a:t>
+            </a:r>
+            <a:r>
+              <a:rPr sz="2000" b="0" lang="en-US">
+                <a:latin typeface="Consolas"/>
+              </a:rPr>
+              <a:t>glossary.md</a:t>
+            </a:r>
+            <a:r>
+              <a:rPr sz="2000" b="0" lang="en-US">
+                <a:latin typeface="Arial"/>
+              </a:rPr>
+              <a:t> in the kit, or at letitglow.app/ahg/kit, first. It is one page.</a:t>
+            </a:r>
+          </a:p>
         </p:txBody>
       </p:sp>
     </p:spTree>
@@ -4413,7 +4561,7 @@
               <a:rPr sz="2000" b="0" lang="en-US">
                 <a:latin typeface="Arial"/>
               </a:rPr>
-              <a:t>Share your practice agent. Open letitglow.app/ahg/share, choose "My practice agent", press "Fill in the practice template", and press "Open the share form on GitHub". On GitHub, sign in if asked, tick the privacy box at the end of the form, and press "Submit new issue".</a:t>
+              <a:t>Share your practice agent. Open letitglow.app/ahg/share, choose "My practice agent", press "Fill in the practice template", and press "Open the share form on GitHub". On GitHub, sign in if asked, select the privacy check box at the end of the form, and press "Submit new issue".</a:t>
             </a:r>
           </a:p>
         </p:txBody>

--- a/docs/ahg-2026/kit/step-cards/0-before-the-day.pptx
+++ b/docs/ahg-2026/kit/step-cards/0-before-the-day.pptx
@@ -4326,6 +4326,26 @@
                 <a:latin typeface="Arial"/>
               </a:rPr>
               <a:t>Make a free GitHub account at github.com, if you do not have one. Use your work email if your institution allows it. If GitHub asks you to set up two-factor sign-in, choose the option that works best with your screen reader or phone; GitHub Mobile and an authenticator app both work.</a:t>
+            </a:r>
+          </a:p>
+          <a:p>
+            <a:pPr lvl="1">
+              <a:spcAft>
+                <a:spcPts val="600"/>
+              </a:spcAft>
+              <a:buNone/>
+            </a:pPr>
+            <a:r>
+              <a:rPr sz="2000" b="0" lang="en-US">
+                <a:latin typeface="Arial"/>
+              </a:rPr>
+              <a:t>2. </a:t>
+            </a:r>
+            <a:r>
+              <a:rPr sz="2000" b="0" lang="en-US">
+                <a:latin typeface="Arial"/>
+              </a:rPr>
+              <a:t>Answer the five-minute survey at letitglow.app/ahg/survey: your name, email and GitHub username, your path, what your laptop and campus allow, and anything we should have ready for you.</a:t>
             </a:r>
           </a:p>
         </p:txBody>
